--- a/poster/Med-Veda-SparQ-2026-Poster-v2.pptx
+++ b/poster/Med-Veda-SparQ-2026-Poster-v2.pptx
@@ -5,9 +5,9 @@
     <p:sldMasterId id="2147483648" r:id="rId1"/>
   </p:sldMasterIdLst>
   <p:sldIdLst>
-    <p:sldId id="256" r:id="rId7"/>
+    <p:sldId id="256" r:id="rId2"/>
   </p:sldIdLst>
-  <p:sldSz cx="21945600" cy="32918400" type="screen4x3"/>
+  <p:sldSz cx="21945600" cy="32918400"/>
   <p:notesSz cx="6858000" cy="9144000"/>
   <p:defaultTextStyle>
     <a:defPPr>
@@ -104,6 +104,22 @@
       </a:defRPr>
     </a:lvl9pPr>
   </p:defaultTextStyle>
+  <p:extLst>
+    <p:ext uri="{EFAFB233-063F-42B5-8137-9DF3F51BA10A}">
+      <p15:sldGuideLst xmlns:p15="http://schemas.microsoft.com/office/powerpoint/2012/main">
+        <p15:guide id="1" orient="horz" pos="2160">
+          <p15:clr>
+            <a:srgbClr val="A4A3A4"/>
+          </p15:clr>
+        </p15:guide>
+        <p15:guide id="2" pos="2880">
+          <p15:clr>
+            <a:srgbClr val="A4A3A4"/>
+          </p15:clr>
+        </p15:guide>
+      </p15:sldGuideLst>
+    </p:ext>
+  </p:extLst>
 </p:presentation>
 </file>
 
@@ -145,10 +161,9 @@
           <a:lstStyle/>
           <a:p>
             <a:r>
-              <a:rPr lang="en-US" smtClean="0"/>
+              <a:rPr lang="en-US"/>
               <a:t>Click to edit Master title style</a:t>
             </a:r>
-            <a:endParaRPr lang="en-US"/>
           </a:p>
         </p:txBody>
       </p:sp>
@@ -264,10 +279,9 @@
           </a:lstStyle>
           <a:p>
             <a:r>
-              <a:rPr lang="en-US" smtClean="0"/>
+              <a:rPr lang="en-US"/>
               <a:t>Click to edit Master subtitle style</a:t>
             </a:r>
-            <a:endParaRPr lang="en-US"/>
           </a:p>
         </p:txBody>
       </p:sp>
@@ -288,7 +302,7 @@
           <a:p>
             <a:fld id="{5BCAD085-E8A6-8845-BD4E-CB4CCA059FC4}" type="datetimeFigureOut">
               <a:rPr lang="en-US" smtClean="0"/>
-              <a:t>1/27/13</a:t>
+              <a:t>6/12/2026</a:t>
             </a:fld>
             <a:endParaRPr lang="en-US"/>
           </a:p>
@@ -382,10 +396,9 @@
           <a:lstStyle/>
           <a:p>
             <a:r>
-              <a:rPr lang="en-US" smtClean="0"/>
+              <a:rPr lang="en-US"/>
               <a:t>Click to edit Master title style</a:t>
             </a:r>
-            <a:endParaRPr lang="en-US"/>
           </a:p>
         </p:txBody>
       </p:sp>
@@ -406,38 +419,37 @@
           <a:p>
             <a:pPr lvl="0"/>
             <a:r>
-              <a:rPr lang="en-US" smtClean="0"/>
+              <a:rPr lang="en-US"/>
               <a:t>Click to edit Master text styles</a:t>
             </a:r>
           </a:p>
           <a:p>
             <a:pPr lvl="1"/>
             <a:r>
-              <a:rPr lang="en-US" smtClean="0"/>
+              <a:rPr lang="en-US"/>
               <a:t>Second level</a:t>
             </a:r>
           </a:p>
           <a:p>
             <a:pPr lvl="2"/>
             <a:r>
-              <a:rPr lang="en-US" smtClean="0"/>
+              <a:rPr lang="en-US"/>
               <a:t>Third level</a:t>
             </a:r>
           </a:p>
           <a:p>
             <a:pPr lvl="3"/>
             <a:r>
-              <a:rPr lang="en-US" smtClean="0"/>
+              <a:rPr lang="en-US"/>
               <a:t>Fourth level</a:t>
             </a:r>
           </a:p>
           <a:p>
             <a:pPr lvl="4"/>
             <a:r>
-              <a:rPr lang="en-US" smtClean="0"/>
+              <a:rPr lang="en-US"/>
               <a:t>Fifth level</a:t>
             </a:r>
-            <a:endParaRPr lang="en-US"/>
           </a:p>
         </p:txBody>
       </p:sp>
@@ -458,7 +470,7 @@
           <a:p>
             <a:fld id="{5BCAD085-E8A6-8845-BD4E-CB4CCA059FC4}" type="datetimeFigureOut">
               <a:rPr lang="en-US" smtClean="0"/>
-              <a:t>1/27/13</a:t>
+              <a:t>6/12/2026</a:t>
             </a:fld>
             <a:endParaRPr lang="en-US"/>
           </a:p>
@@ -557,10 +569,9 @@
           <a:lstStyle/>
           <a:p>
             <a:r>
-              <a:rPr lang="en-US" smtClean="0"/>
+              <a:rPr lang="en-US"/>
               <a:t>Click to edit Master title style</a:t>
             </a:r>
-            <a:endParaRPr lang="en-US"/>
           </a:p>
         </p:txBody>
       </p:sp>
@@ -586,38 +597,37 @@
           <a:p>
             <a:pPr lvl="0"/>
             <a:r>
-              <a:rPr lang="en-US" smtClean="0"/>
+              <a:rPr lang="en-US"/>
               <a:t>Click to edit Master text styles</a:t>
             </a:r>
           </a:p>
           <a:p>
             <a:pPr lvl="1"/>
             <a:r>
-              <a:rPr lang="en-US" smtClean="0"/>
+              <a:rPr lang="en-US"/>
               <a:t>Second level</a:t>
             </a:r>
           </a:p>
           <a:p>
             <a:pPr lvl="2"/>
             <a:r>
-              <a:rPr lang="en-US" smtClean="0"/>
+              <a:rPr lang="en-US"/>
               <a:t>Third level</a:t>
             </a:r>
           </a:p>
           <a:p>
             <a:pPr lvl="3"/>
             <a:r>
-              <a:rPr lang="en-US" smtClean="0"/>
+              <a:rPr lang="en-US"/>
               <a:t>Fourth level</a:t>
             </a:r>
           </a:p>
           <a:p>
             <a:pPr lvl="4"/>
             <a:r>
-              <a:rPr lang="en-US" smtClean="0"/>
+              <a:rPr lang="en-US"/>
               <a:t>Fifth level</a:t>
             </a:r>
-            <a:endParaRPr lang="en-US"/>
           </a:p>
         </p:txBody>
       </p:sp>
@@ -638,7 +648,7 @@
           <a:p>
             <a:fld id="{5BCAD085-E8A6-8845-BD4E-CB4CCA059FC4}" type="datetimeFigureOut">
               <a:rPr lang="en-US" smtClean="0"/>
-              <a:t>1/27/13</a:t>
+              <a:t>6/12/2026</a:t>
             </a:fld>
             <a:endParaRPr lang="en-US"/>
           </a:p>
@@ -732,10 +742,9 @@
           <a:lstStyle/>
           <a:p>
             <a:r>
-              <a:rPr lang="en-US" smtClean="0"/>
+              <a:rPr lang="en-US"/>
               <a:t>Click to edit Master title style</a:t>
             </a:r>
-            <a:endParaRPr lang="en-US"/>
           </a:p>
         </p:txBody>
       </p:sp>
@@ -756,38 +765,37 @@
           <a:p>
             <a:pPr lvl="0"/>
             <a:r>
-              <a:rPr lang="en-US" smtClean="0"/>
+              <a:rPr lang="en-US"/>
               <a:t>Click to edit Master text styles</a:t>
             </a:r>
           </a:p>
           <a:p>
             <a:pPr lvl="1"/>
             <a:r>
-              <a:rPr lang="en-US" smtClean="0"/>
+              <a:rPr lang="en-US"/>
               <a:t>Second level</a:t>
             </a:r>
           </a:p>
           <a:p>
             <a:pPr lvl="2"/>
             <a:r>
-              <a:rPr lang="en-US" smtClean="0"/>
+              <a:rPr lang="en-US"/>
               <a:t>Third level</a:t>
             </a:r>
           </a:p>
           <a:p>
             <a:pPr lvl="3"/>
             <a:r>
-              <a:rPr lang="en-US" smtClean="0"/>
+              <a:rPr lang="en-US"/>
               <a:t>Fourth level</a:t>
             </a:r>
           </a:p>
           <a:p>
             <a:pPr lvl="4"/>
             <a:r>
-              <a:rPr lang="en-US" smtClean="0"/>
+              <a:rPr lang="en-US"/>
               <a:t>Fifth level</a:t>
             </a:r>
-            <a:endParaRPr lang="en-US"/>
           </a:p>
         </p:txBody>
       </p:sp>
@@ -808,7 +816,7 @@
           <a:p>
             <a:fld id="{5BCAD085-E8A6-8845-BD4E-CB4CCA059FC4}" type="datetimeFigureOut">
               <a:rPr lang="en-US" smtClean="0"/>
-              <a:t>1/27/13</a:t>
+              <a:t>6/12/2026</a:t>
             </a:fld>
             <a:endParaRPr lang="en-US"/>
           </a:p>
@@ -911,10 +919,9 @@
           </a:lstStyle>
           <a:p>
             <a:r>
-              <a:rPr lang="en-US" smtClean="0"/>
+              <a:rPr lang="en-US"/>
               <a:t>Click to edit Master title style</a:t>
             </a:r>
-            <a:endParaRPr lang="en-US"/>
           </a:p>
         </p:txBody>
       </p:sp>
@@ -1031,7 +1038,7 @@
           <a:p>
             <a:pPr lvl="0"/>
             <a:r>
-              <a:rPr lang="en-US" smtClean="0"/>
+              <a:rPr lang="en-US"/>
               <a:t>Click to edit Master text styles</a:t>
             </a:r>
           </a:p>
@@ -1054,7 +1061,7 @@
           <a:p>
             <a:fld id="{5BCAD085-E8A6-8845-BD4E-CB4CCA059FC4}" type="datetimeFigureOut">
               <a:rPr lang="en-US" smtClean="0"/>
-              <a:t>1/27/13</a:t>
+              <a:t>6/12/2026</a:t>
             </a:fld>
             <a:endParaRPr lang="en-US"/>
           </a:p>
@@ -1148,10 +1155,9 @@
           <a:lstStyle/>
           <a:p>
             <a:r>
-              <a:rPr lang="en-US" smtClean="0"/>
+              <a:rPr lang="en-US"/>
               <a:t>Click to edit Master title style</a:t>
             </a:r>
-            <a:endParaRPr lang="en-US"/>
           </a:p>
         </p:txBody>
       </p:sp>
@@ -1205,38 +1211,37 @@
           <a:p>
             <a:pPr lvl="0"/>
             <a:r>
-              <a:rPr lang="en-US" smtClean="0"/>
+              <a:rPr lang="en-US"/>
               <a:t>Click to edit Master text styles</a:t>
             </a:r>
           </a:p>
           <a:p>
             <a:pPr lvl="1"/>
             <a:r>
-              <a:rPr lang="en-US" smtClean="0"/>
+              <a:rPr lang="en-US"/>
               <a:t>Second level</a:t>
             </a:r>
           </a:p>
           <a:p>
             <a:pPr lvl="2"/>
             <a:r>
-              <a:rPr lang="en-US" smtClean="0"/>
+              <a:rPr lang="en-US"/>
               <a:t>Third level</a:t>
             </a:r>
           </a:p>
           <a:p>
             <a:pPr lvl="3"/>
             <a:r>
-              <a:rPr lang="en-US" smtClean="0"/>
+              <a:rPr lang="en-US"/>
               <a:t>Fourth level</a:t>
             </a:r>
           </a:p>
           <a:p>
             <a:pPr lvl="4"/>
             <a:r>
-              <a:rPr lang="en-US" smtClean="0"/>
+              <a:rPr lang="en-US"/>
               <a:t>Fifth level</a:t>
             </a:r>
-            <a:endParaRPr lang="en-US"/>
           </a:p>
         </p:txBody>
       </p:sp>
@@ -1290,38 +1295,37 @@
           <a:p>
             <a:pPr lvl="0"/>
             <a:r>
-              <a:rPr lang="en-US" smtClean="0"/>
+              <a:rPr lang="en-US"/>
               <a:t>Click to edit Master text styles</a:t>
             </a:r>
           </a:p>
           <a:p>
             <a:pPr lvl="1"/>
             <a:r>
-              <a:rPr lang="en-US" smtClean="0"/>
+              <a:rPr lang="en-US"/>
               <a:t>Second level</a:t>
             </a:r>
           </a:p>
           <a:p>
             <a:pPr lvl="2"/>
             <a:r>
-              <a:rPr lang="en-US" smtClean="0"/>
+              <a:rPr lang="en-US"/>
               <a:t>Third level</a:t>
             </a:r>
           </a:p>
           <a:p>
             <a:pPr lvl="3"/>
             <a:r>
-              <a:rPr lang="en-US" smtClean="0"/>
+              <a:rPr lang="en-US"/>
               <a:t>Fourth level</a:t>
             </a:r>
           </a:p>
           <a:p>
             <a:pPr lvl="4"/>
             <a:r>
-              <a:rPr lang="en-US" smtClean="0"/>
+              <a:rPr lang="en-US"/>
               <a:t>Fifth level</a:t>
             </a:r>
-            <a:endParaRPr lang="en-US"/>
           </a:p>
         </p:txBody>
       </p:sp>
@@ -1342,7 +1346,7 @@
           <a:p>
             <a:fld id="{5BCAD085-E8A6-8845-BD4E-CB4CCA059FC4}" type="datetimeFigureOut">
               <a:rPr lang="en-US" smtClean="0"/>
-              <a:t>1/27/13</a:t>
+              <a:t>6/12/2026</a:t>
             </a:fld>
             <a:endParaRPr lang="en-US"/>
           </a:p>
@@ -1440,10 +1444,9 @@
           </a:lstStyle>
           <a:p>
             <a:r>
-              <a:rPr lang="en-US" smtClean="0"/>
+              <a:rPr lang="en-US"/>
               <a:t>Click to edit Master title style</a:t>
             </a:r>
-            <a:endParaRPr lang="en-US"/>
           </a:p>
         </p:txBody>
       </p:sp>
@@ -1506,7 +1509,7 @@
           <a:p>
             <a:pPr lvl="0"/>
             <a:r>
-              <a:rPr lang="en-US" smtClean="0"/>
+              <a:rPr lang="en-US"/>
               <a:t>Click to edit Master text styles</a:t>
             </a:r>
           </a:p>
@@ -1562,38 +1565,37 @@
           <a:p>
             <a:pPr lvl="0"/>
             <a:r>
-              <a:rPr lang="en-US" smtClean="0"/>
+              <a:rPr lang="en-US"/>
               <a:t>Click to edit Master text styles</a:t>
             </a:r>
           </a:p>
           <a:p>
             <a:pPr lvl="1"/>
             <a:r>
-              <a:rPr lang="en-US" smtClean="0"/>
+              <a:rPr lang="en-US"/>
               <a:t>Second level</a:t>
             </a:r>
           </a:p>
           <a:p>
             <a:pPr lvl="2"/>
             <a:r>
-              <a:rPr lang="en-US" smtClean="0"/>
+              <a:rPr lang="en-US"/>
               <a:t>Third level</a:t>
             </a:r>
           </a:p>
           <a:p>
             <a:pPr lvl="3"/>
             <a:r>
-              <a:rPr lang="en-US" smtClean="0"/>
+              <a:rPr lang="en-US"/>
               <a:t>Fourth level</a:t>
             </a:r>
           </a:p>
           <a:p>
             <a:pPr lvl="4"/>
             <a:r>
-              <a:rPr lang="en-US" smtClean="0"/>
+              <a:rPr lang="en-US"/>
               <a:t>Fifth level</a:t>
             </a:r>
-            <a:endParaRPr lang="en-US"/>
           </a:p>
         </p:txBody>
       </p:sp>
@@ -1656,7 +1658,7 @@
           <a:p>
             <a:pPr lvl="0"/>
             <a:r>
-              <a:rPr lang="en-US" smtClean="0"/>
+              <a:rPr lang="en-US"/>
               <a:t>Click to edit Master text styles</a:t>
             </a:r>
           </a:p>
@@ -1712,38 +1714,37 @@
           <a:p>
             <a:pPr lvl="0"/>
             <a:r>
-              <a:rPr lang="en-US" smtClean="0"/>
+              <a:rPr lang="en-US"/>
               <a:t>Click to edit Master text styles</a:t>
             </a:r>
           </a:p>
           <a:p>
             <a:pPr lvl="1"/>
             <a:r>
-              <a:rPr lang="en-US" smtClean="0"/>
+              <a:rPr lang="en-US"/>
               <a:t>Second level</a:t>
             </a:r>
           </a:p>
           <a:p>
             <a:pPr lvl="2"/>
             <a:r>
-              <a:rPr lang="en-US" smtClean="0"/>
+              <a:rPr lang="en-US"/>
               <a:t>Third level</a:t>
             </a:r>
           </a:p>
           <a:p>
             <a:pPr lvl="3"/>
             <a:r>
-              <a:rPr lang="en-US" smtClean="0"/>
+              <a:rPr lang="en-US"/>
               <a:t>Fourth level</a:t>
             </a:r>
           </a:p>
           <a:p>
             <a:pPr lvl="4"/>
             <a:r>
-              <a:rPr lang="en-US" smtClean="0"/>
+              <a:rPr lang="en-US"/>
               <a:t>Fifth level</a:t>
             </a:r>
-            <a:endParaRPr lang="en-US"/>
           </a:p>
         </p:txBody>
       </p:sp>
@@ -1764,7 +1765,7 @@
           <a:p>
             <a:fld id="{5BCAD085-E8A6-8845-BD4E-CB4CCA059FC4}" type="datetimeFigureOut">
               <a:rPr lang="en-US" smtClean="0"/>
-              <a:t>1/27/13</a:t>
+              <a:t>6/12/2026</a:t>
             </a:fld>
             <a:endParaRPr lang="en-US"/>
           </a:p>
@@ -1858,10 +1859,9 @@
           <a:lstStyle/>
           <a:p>
             <a:r>
-              <a:rPr lang="en-US" smtClean="0"/>
+              <a:rPr lang="en-US"/>
               <a:t>Click to edit Master title style</a:t>
             </a:r>
-            <a:endParaRPr lang="en-US"/>
           </a:p>
         </p:txBody>
       </p:sp>
@@ -1882,7 +1882,7 @@
           <a:p>
             <a:fld id="{5BCAD085-E8A6-8845-BD4E-CB4CCA059FC4}" type="datetimeFigureOut">
               <a:rPr lang="en-US" smtClean="0"/>
-              <a:t>1/27/13</a:t>
+              <a:t>6/12/2026</a:t>
             </a:fld>
             <a:endParaRPr lang="en-US"/>
           </a:p>
@@ -1977,7 +1977,7 @@
           <a:p>
             <a:fld id="{5BCAD085-E8A6-8845-BD4E-CB4CCA059FC4}" type="datetimeFigureOut">
               <a:rPr lang="en-US" smtClean="0"/>
-              <a:t>1/27/13</a:t>
+              <a:t>6/12/2026</a:t>
             </a:fld>
             <a:endParaRPr lang="en-US"/>
           </a:p>
@@ -2080,10 +2080,9 @@
           </a:lstStyle>
           <a:p>
             <a:r>
-              <a:rPr lang="en-US" smtClean="0"/>
+              <a:rPr lang="en-US"/>
               <a:t>Click to edit Master title style</a:t>
             </a:r>
-            <a:endParaRPr lang="en-US"/>
           </a:p>
         </p:txBody>
       </p:sp>
@@ -2137,38 +2136,37 @@
           <a:p>
             <a:pPr lvl="0"/>
             <a:r>
-              <a:rPr lang="en-US" smtClean="0"/>
+              <a:rPr lang="en-US"/>
               <a:t>Click to edit Master text styles</a:t>
             </a:r>
           </a:p>
           <a:p>
             <a:pPr lvl="1"/>
             <a:r>
-              <a:rPr lang="en-US" smtClean="0"/>
+              <a:rPr lang="en-US"/>
               <a:t>Second level</a:t>
             </a:r>
           </a:p>
           <a:p>
             <a:pPr lvl="2"/>
             <a:r>
-              <a:rPr lang="en-US" smtClean="0"/>
+              <a:rPr lang="en-US"/>
               <a:t>Third level</a:t>
             </a:r>
           </a:p>
           <a:p>
             <a:pPr lvl="3"/>
             <a:r>
-              <a:rPr lang="en-US" smtClean="0"/>
+              <a:rPr lang="en-US"/>
               <a:t>Fourth level</a:t>
             </a:r>
           </a:p>
           <a:p>
             <a:pPr lvl="4"/>
             <a:r>
-              <a:rPr lang="en-US" smtClean="0"/>
+              <a:rPr lang="en-US"/>
               <a:t>Fifth level</a:t>
             </a:r>
-            <a:endParaRPr lang="en-US"/>
           </a:p>
         </p:txBody>
       </p:sp>
@@ -2231,7 +2229,7 @@
           <a:p>
             <a:pPr lvl="0"/>
             <a:r>
-              <a:rPr lang="en-US" smtClean="0"/>
+              <a:rPr lang="en-US"/>
               <a:t>Click to edit Master text styles</a:t>
             </a:r>
           </a:p>
@@ -2254,7 +2252,7 @@
           <a:p>
             <a:fld id="{5BCAD085-E8A6-8845-BD4E-CB4CCA059FC4}" type="datetimeFigureOut">
               <a:rPr lang="en-US" smtClean="0"/>
-              <a:t>1/27/13</a:t>
+              <a:t>6/12/2026</a:t>
             </a:fld>
             <a:endParaRPr lang="en-US"/>
           </a:p>
@@ -2357,10 +2355,9 @@
           </a:lstStyle>
           <a:p>
             <a:r>
-              <a:rPr lang="en-US" smtClean="0"/>
+              <a:rPr lang="en-US"/>
               <a:t>Click to edit Master title style</a:t>
             </a:r>
-            <a:endParaRPr lang="en-US"/>
           </a:p>
         </p:txBody>
       </p:sp>
@@ -2484,7 +2481,7 @@
           <a:p>
             <a:pPr lvl="0"/>
             <a:r>
-              <a:rPr lang="en-US" smtClean="0"/>
+              <a:rPr lang="en-US"/>
               <a:t>Click to edit Master text styles</a:t>
             </a:r>
           </a:p>
@@ -2507,7 +2504,7 @@
           <a:p>
             <a:fld id="{5BCAD085-E8A6-8845-BD4E-CB4CCA059FC4}" type="datetimeFigureOut">
               <a:rPr lang="en-US" smtClean="0"/>
-              <a:t>1/27/13</a:t>
+              <a:t>6/12/2026</a:t>
             </a:fld>
             <a:endParaRPr lang="en-US"/>
           </a:p>
@@ -2616,10 +2613,9 @@
           <a:lstStyle/>
           <a:p>
             <a:r>
-              <a:rPr lang="en-US" smtClean="0"/>
+              <a:rPr lang="en-US"/>
               <a:t>Click to edit Master title style</a:t>
             </a:r>
-            <a:endParaRPr lang="en-US"/>
           </a:p>
         </p:txBody>
       </p:sp>
@@ -2650,38 +2646,37 @@
           <a:p>
             <a:pPr lvl="0"/>
             <a:r>
-              <a:rPr lang="en-US" smtClean="0"/>
+              <a:rPr lang="en-US"/>
               <a:t>Click to edit Master text styles</a:t>
             </a:r>
           </a:p>
           <a:p>
             <a:pPr lvl="1"/>
             <a:r>
-              <a:rPr lang="en-US" smtClean="0"/>
+              <a:rPr lang="en-US"/>
               <a:t>Second level</a:t>
             </a:r>
           </a:p>
           <a:p>
             <a:pPr lvl="2"/>
             <a:r>
-              <a:rPr lang="en-US" smtClean="0"/>
+              <a:rPr lang="en-US"/>
               <a:t>Third level</a:t>
             </a:r>
           </a:p>
           <a:p>
             <a:pPr lvl="3"/>
             <a:r>
-              <a:rPr lang="en-US" smtClean="0"/>
+              <a:rPr lang="en-US"/>
               <a:t>Fourth level</a:t>
             </a:r>
           </a:p>
           <a:p>
             <a:pPr lvl="4"/>
             <a:r>
-              <a:rPr lang="en-US" smtClean="0"/>
+              <a:rPr lang="en-US"/>
               <a:t>Fifth level</a:t>
             </a:r>
-            <a:endParaRPr lang="en-US"/>
           </a:p>
         </p:txBody>
       </p:sp>
@@ -2720,7 +2715,7 @@
           <a:p>
             <a:fld id="{5BCAD085-E8A6-8845-BD4E-CB4CCA059FC4}" type="datetimeFigureOut">
               <a:rPr lang="en-US" smtClean="0"/>
-              <a:t>1/27/13</a:t>
+              <a:t>6/12/2026</a:t>
             </a:fld>
             <a:endParaRPr lang="en-US"/>
           </a:p>
@@ -3079,7 +3074,7 @@
 </file>
 
 <file path=ppt/slides/slide1.xml><?xml version="1.0" encoding="utf-8"?>
-<p:sld xmlns:a="http://schemas.openxmlformats.org/drawingml/2006/main" xmlns:p="http://schemas.openxmlformats.org/presentationml/2006/main" xmlns:r="http://schemas.openxmlformats.org/officeDocument/2006/relationships">
+<p:sld xmlns:a="http://schemas.openxmlformats.org/drawingml/2006/main" xmlns:r="http://schemas.openxmlformats.org/officeDocument/2006/relationships" xmlns:p="http://schemas.openxmlformats.org/presentationml/2006/main">
   <p:cSld>
     <p:spTree>
       <p:nvGrpSpPr>
@@ -3087,7 +3082,14 @@
         <p:cNvGrpSpPr/>
         <p:nvPr/>
       </p:nvGrpSpPr>
-      <p:grpSpPr/>
+      <p:grpSpPr>
+        <a:xfrm>
+          <a:off x="0" y="0"/>
+          <a:ext cx="0" cy="0"/>
+          <a:chOff x="0" y="0"/>
+          <a:chExt cx="0" cy="0"/>
+        </a:xfrm>
+      </p:grpSpPr>
       <p:sp>
         <p:nvSpPr>
           <p:cNvPr id="2" name="Rectangle 1"/>
@@ -3128,6 +3130,7 @@
           <a:lstStyle/>
           <a:p>
             <a:pPr algn="ctr"/>
+            <a:endParaRPr/>
           </a:p>
         </p:txBody>
       </p:sp>
@@ -3195,6 +3198,7 @@
           <a:lstStyle/>
           <a:p>
             <a:pPr algn="ctr"/>
+            <a:endParaRPr/>
           </a:p>
         </p:txBody>
       </p:sp>
@@ -3337,6 +3341,7 @@
           <a:lstStyle/>
           <a:p>
             <a:pPr algn="ctr"/>
+            <a:endParaRPr/>
           </a:p>
         </p:txBody>
       </p:sp>
@@ -3413,6 +3418,7 @@
           <a:lstStyle/>
           <a:p>
             <a:pPr algn="ctr"/>
+            <a:endParaRPr/>
           </a:p>
         </p:txBody>
       </p:sp>
@@ -3489,6 +3495,7 @@
           <a:lstStyle/>
           <a:p>
             <a:pPr algn="ctr"/>
+            <a:endParaRPr/>
           </a:p>
         </p:txBody>
       </p:sp>
@@ -3565,6 +3572,7 @@
           <a:lstStyle/>
           <a:p>
             <a:pPr algn="ctr"/>
+            <a:endParaRPr/>
           </a:p>
         </p:txBody>
       </p:sp>
@@ -3610,6 +3618,7 @@
           <a:lstStyle/>
           <a:p>
             <a:pPr algn="ctr"/>
+            <a:endParaRPr/>
           </a:p>
         </p:txBody>
       </p:sp>
@@ -3655,6 +3664,7 @@
           <a:lstStyle/>
           <a:p>
             <a:pPr algn="ctr"/>
+            <a:endParaRPr/>
           </a:p>
         </p:txBody>
       </p:sp>
@@ -3699,8 +3709,8 @@
         </p:nvSpPr>
         <p:spPr>
           <a:xfrm>
-            <a:off x="685800" y="5303520"/>
-            <a:ext cx="6675120" cy="5257800"/>
+            <a:off x="675640" y="5166359"/>
+            <a:ext cx="6730999" cy="4393690"/>
           </a:xfrm>
           <a:prstGeom prst="rect">
             <a:avLst/>
@@ -3713,7 +3723,7 @@
           <a:p>
             <a:pPr algn="l"/>
             <a:r>
-              <a:rPr sz="1600" b="0">
+              <a:rPr sz="1600" b="0" dirty="0">
                 <a:solidFill>
                   <a:srgbClr val="000000"/>
                 </a:solidFill>
@@ -3769,6 +3779,7 @@
           <a:lstStyle/>
           <a:p>
             <a:pPr algn="ctr"/>
+            <a:endParaRPr/>
           </a:p>
         </p:txBody>
       </p:sp>
@@ -3814,6 +3825,7 @@
           <a:lstStyle/>
           <a:p>
             <a:pPr algn="ctr"/>
+            <a:endParaRPr/>
           </a:p>
         </p:txBody>
       </p:sp>
@@ -3869,7 +3881,9 @@
         <p:txBody>
           <a:bodyPr wrap="square"/>
           <a:lstStyle/>
-          <a:p/>
+          <a:p>
+            <a:endParaRPr/>
+          </a:p>
           <a:p>
             <a:pPr>
               <a:spcBef>
@@ -4009,6 +4023,7 @@
           <a:lstStyle/>
           <a:p>
             <a:pPr algn="ctr"/>
+            <a:endParaRPr/>
           </a:p>
         </p:txBody>
       </p:sp>
@@ -4054,6 +4069,7 @@
           <a:lstStyle/>
           <a:p>
             <a:pPr algn="ctr"/>
+            <a:endParaRPr/>
           </a:p>
         </p:txBody>
       </p:sp>
@@ -4109,7 +4125,9 @@
         <p:txBody>
           <a:bodyPr wrap="square"/>
           <a:lstStyle/>
-          <a:p/>
+          <a:p>
+            <a:endParaRPr/>
+          </a:p>
           <a:p>
             <a:pPr>
               <a:spcBef>
@@ -4329,6 +4347,7 @@
           <a:lstStyle/>
           <a:p>
             <a:pPr algn="ctr"/>
+            <a:endParaRPr/>
           </a:p>
         </p:txBody>
       </p:sp>
@@ -4374,6 +4393,7 @@
           <a:lstStyle/>
           <a:p>
             <a:pPr algn="ctr"/>
+            <a:endParaRPr/>
           </a:p>
         </p:txBody>
       </p:sp>
@@ -4452,6 +4472,7 @@
           <a:lstStyle/>
           <a:p>
             <a:pPr algn="ctr"/>
+            <a:endParaRPr/>
           </a:p>
         </p:txBody>
       </p:sp>
@@ -4495,6 +4516,7 @@
           <a:lstStyle/>
           <a:p>
             <a:pPr algn="ctr"/>
+            <a:endParaRPr/>
           </a:p>
         </p:txBody>
       </p:sp>
@@ -4639,6 +4661,7 @@
           <a:lstStyle/>
           <a:p>
             <a:pPr algn="ctr"/>
+            <a:endParaRPr/>
           </a:p>
         </p:txBody>
       </p:sp>
@@ -4682,6 +4705,7 @@
           <a:lstStyle/>
           <a:p>
             <a:pPr algn="ctr"/>
+            <a:endParaRPr/>
           </a:p>
         </p:txBody>
       </p:sp>
@@ -4826,6 +4850,7 @@
           <a:lstStyle/>
           <a:p>
             <a:pPr algn="ctr"/>
+            <a:endParaRPr/>
           </a:p>
         </p:txBody>
       </p:sp>
@@ -4869,6 +4894,7 @@
           <a:lstStyle/>
           <a:p>
             <a:pPr algn="ctr"/>
+            <a:endParaRPr/>
           </a:p>
         </p:txBody>
       </p:sp>
@@ -5013,6 +5039,7 @@
           <a:lstStyle/>
           <a:p>
             <a:pPr algn="ctr"/>
+            <a:endParaRPr/>
           </a:p>
         </p:txBody>
       </p:sp>
@@ -5058,6 +5085,7 @@
           <a:lstStyle/>
           <a:p>
             <a:pPr algn="ctr"/>
+            <a:endParaRPr/>
           </a:p>
         </p:txBody>
       </p:sp>
@@ -5170,6 +5198,7 @@
           <a:lstStyle/>
           <a:p>
             <a:pPr algn="ctr"/>
+            <a:endParaRPr/>
           </a:p>
         </p:txBody>
       </p:sp>
@@ -5215,6 +5244,7 @@
           <a:lstStyle/>
           <a:p>
             <a:pPr algn="ctr"/>
+            <a:endParaRPr/>
           </a:p>
         </p:txBody>
       </p:sp>
@@ -5317,6 +5347,7 @@
           <a:lstStyle/>
           <a:p>
             <a:pPr algn="ctr"/>
+            <a:endParaRPr/>
           </a:p>
         </p:txBody>
       </p:sp>
@@ -5362,6 +5393,7 @@
           <a:lstStyle/>
           <a:p>
             <a:pPr algn="ctr"/>
+            <a:endParaRPr/>
           </a:p>
         </p:txBody>
       </p:sp>
@@ -5464,6 +5496,7 @@
           <a:lstStyle/>
           <a:p>
             <a:pPr algn="ctr"/>
+            <a:endParaRPr/>
           </a:p>
         </p:txBody>
       </p:sp>
@@ -5509,6 +5542,7 @@
           <a:lstStyle/>
           <a:p>
             <a:pPr algn="ctr"/>
+            <a:endParaRPr/>
           </a:p>
         </p:txBody>
       </p:sp>
@@ -5993,8 +6027,8 @@
         </p:nvSpPr>
         <p:spPr>
           <a:xfrm>
-            <a:off x="8046720" y="23637239"/>
-            <a:ext cx="13441680" cy="9189720"/>
+            <a:off x="8046720" y="23436073"/>
+            <a:ext cx="13441680" cy="8842247"/>
           </a:xfrm>
           <a:prstGeom prst="rect">
             <a:avLst/>
@@ -6027,6 +6061,7 @@
           <a:lstStyle/>
           <a:p>
             <a:pPr algn="ctr"/>
+            <a:endParaRPr/>
           </a:p>
         </p:txBody>
       </p:sp>
@@ -6072,6 +6107,7 @@
           <a:lstStyle/>
           <a:p>
             <a:pPr algn="ctr"/>
+            <a:endParaRPr/>
           </a:p>
         </p:txBody>
       </p:sp>
@@ -6172,7 +6208,7 @@
         </p:blipFill>
         <p:spPr>
           <a:xfrm>
-            <a:off x="8275320" y="29672279"/>
+            <a:off x="8183880" y="28940759"/>
             <a:ext cx="12984480" cy="2011680"/>
           </a:xfrm>
           <a:prstGeom prst="rect">
@@ -6199,7 +6235,9 @@
         <p:txBody>
           <a:bodyPr wrap="square"/>
           <a:lstStyle/>
-          <a:p/>
+          <a:p>
+            <a:endParaRPr/>
+          </a:p>
           <a:p>
             <a:pPr>
               <a:spcBef>
@@ -6299,6 +6337,7 @@
           <a:lstStyle/>
           <a:p>
             <a:pPr algn="ctr"/>
+            <a:endParaRPr/>
           </a:p>
         </p:txBody>
       </p:sp>
@@ -6324,14 +6363,38 @@
           <a:p>
             <a:pPr algn="l"/>
             <a:r>
-              <a:rPr sz="2600" b="1">
+              <a:rPr sz="2600" b="1" dirty="0">
                 <a:solidFill>
                   <a:srgbClr val="FFFFFF"/>
                 </a:solidFill>
                 <a:latin typeface="Calibri"/>
               </a:rPr>
-              <a:t>Itikela Bhaskar  |  Vinay G</a:t>
-            </a:r>
+              <a:t>Itikela Bhaskar  |  Vi</a:t>
+            </a:r>
+            <a:r>
+              <a:rPr lang="en-US" sz="2600" b="1" dirty="0">
+                <a:solidFill>
+                  <a:srgbClr val="FFFFFF"/>
+                </a:solidFill>
+                <a:latin typeface="Calibri"/>
+              </a:rPr>
+              <a:t>jay </a:t>
+            </a:r>
+            <a:r>
+              <a:rPr lang="en-US" sz="2600" b="1" dirty="0" err="1">
+                <a:solidFill>
+                  <a:srgbClr val="FFFFFF"/>
+                </a:solidFill>
+                <a:latin typeface="Calibri"/>
+              </a:rPr>
+              <a:t>Aravynthan</a:t>
+            </a:r>
+            <a:endParaRPr sz="2600" b="1" dirty="0">
+              <a:solidFill>
+                <a:srgbClr val="FFFFFF"/>
+              </a:solidFill>
+              <a:latin typeface="Calibri"/>
+            </a:endParaRPr>
           </a:p>
         </p:txBody>
       </p:sp>
@@ -6370,39 +6433,6 @@
       </p:sp>
       <p:sp>
         <p:nvSpPr>
-          <p:cNvPr id="78" name="TextBox 77"/>
-          <p:cNvSpPr txBox="1"/>
-          <p:nvPr/>
-        </p:nvSpPr>
-        <p:spPr>
-          <a:xfrm>
-            <a:off x="548640" y="32278319"/>
-            <a:ext cx="9144000" cy="365760"/>
-          </a:xfrm>
-          <a:prstGeom prst="rect">
-            <a:avLst/>
-          </a:prstGeom>
-          <a:noFill/>
-        </p:spPr>
-        <p:txBody>
-          <a:bodyPr wrap="square"/>
-          <a:lstStyle/>
-          <a:p>
-            <a:pPr algn="l"/>
-            <a:r>
-              <a:rPr sz="1600" b="0">
-                <a:solidFill>
-                  <a:srgbClr val="AAAAAA"/>
-                </a:solidFill>
-                <a:latin typeface="Calibri"/>
-              </a:rPr>
-              <a:t>vinayg1752004@gmail.com</a:t>
-            </a:r>
-          </a:p>
-        </p:txBody>
-      </p:sp>
-      <p:sp>
-        <p:nvSpPr>
           <p:cNvPr id="79" name="TextBox 78"/>
           <p:cNvSpPr txBox="1"/>
           <p:nvPr/>
@@ -6423,13 +6453,22 @@
           <a:p>
             <a:pPr algn="r"/>
             <a:r>
-              <a:rPr sz="2200" b="1">
+              <a:rPr sz="2200" b="1" dirty="0" err="1">
                 <a:solidFill>
                   <a:srgbClr val="FFB300"/>
                 </a:solidFill>
                 <a:latin typeface="Calibri"/>
               </a:rPr>
-              <a:t>SparQ 2026 — Pervasive AI Theme</a:t>
+              <a:t>SparQ</a:t>
+            </a:r>
+            <a:r>
+              <a:rPr sz="2200" b="1" dirty="0">
+                <a:solidFill>
+                  <a:srgbClr val="FFB300"/>
+                </a:solidFill>
+                <a:latin typeface="Calibri"/>
+              </a:rPr>
+              <a:t> 2026 — Pervasive AI</a:t>
             </a:r>
           </a:p>
         </p:txBody>
